--- a/Slides/Semana 9/semana_9_slides.pptx
+++ b/Slides/Semana 9/semana_9_slides.pptx
@@ -975,7 +975,7 @@
 - "Se tivéssemos que entregar hoje, o que já está pronto?"
 - "Esse comentário aponta um critério específico, ou é só uma impressão geral?"
 Avaliação nesta semana: continuidade do ciclo de observação da Etapa de Preparação (Semanas 8–11), segundo a Rubrica de Avaliação. Observa-se Gestão do Projeto (lista atualizada, progresso relatado objetivamente), Trabalho em Equipe (distribuição equilibrada com o aumento do volume de produção) e Documentação (registro contínuo das versões e do roteiro de revisão cruzada preenchido).
-Fonte: Plano Semanal Semana 9, Cronograma, CLAUDE.md, COURSE_CONTEXT.md, PEDAGOGICAL_RULES.md, EXTENSION_PROJECT_GUIDE.md.</a:t>
+Fonte: Plano Semanal Semana 9, Cronograma.</a:t>
             </a:r>
             <a:endParaRPr lang="en-US" dirty="0"/>
           </a:p>
